--- a/it/slides/20-Architettura_dei_Calcolatori-Scheda_Video-Codice.pptx
+++ b/it/slides/20-Architettura_dei_Calcolatori-Scheda_Video-Codice.pptx
@@ -117,24 +117,24 @@
   <p:extLst>
     <p:ext uri="{521415D9-36F7-43E2-AB2F-B90AF26B5E84}">
       <p14:sectionLst xmlns:p14="http://schemas.microsoft.com/office/powerpoint/2010/main">
-        <p14:section name="Apertura" id="{2273efb4-d30c-7bcf-40c6-742e9a07c654}">
+        <p14:section name="Apertura" id="{f1c72a54-93bb-5d71-e70d-84fa594335cd}">
           <p14:sldIdLst>
             <p14:sldId id="256"/>
             <p14:sldId id="257"/>
           </p14:sldIdLst>
         </p14:section>
-        <p14:section name="I listati" id="{663927bd-2e2a-dee3-c61a-d99a438a832d}">
+        <p14:section name="Riscaldamento sulla macchina" id="{f63f739c-632e-8bae-c1c9-9088e2aad5d6}">
           <p14:sldIdLst>
             <p14:sldId id="258"/>
           </p14:sldIdLst>
         </p14:section>
-        <p14:section name="Il programma completo" id="{43fe778d-1867-be39-4529-cee3f9b202dd}">
+        <p14:section name="Il programma completo" id="{1021300e-a4bf-6558-c6d5-82fa0b916e36}">
           <p14:sldIdLst>
             <p14:sldId id="259"/>
             <p14:sldId id="260"/>
           </p14:sldIdLst>
         </p14:section>
-        <p14:section name="Eseguire e provare" id="{0cccbf93-55c0-cb69-b792-ac138693b243}">
+        <p14:section name="Eseguire e provare" id="{ba9529ca-8268-75a5-5873-7e44aedb8906}">
           <p14:sldIdLst>
             <p14:sldId id="261"/>
             <p14:sldId id="262"/>
@@ -143,7 +143,7 @@
             <p14:sldId id="265"/>
           </p14:sldIdLst>
         </p14:section>
-        <p14:section name="Esercizi" id="{b4962477-5206-2991-e82e-41b847c966d4}">
+        <p14:section name="Esercizi" id="{43ebc217-861b-c6c5-69bb-8805e9195cb1}">
           <p14:sldIdLst>
             <p14:sldId id="266"/>
           </p14:sldIdLst>
@@ -2416,7 +2416,63 @@
       </p:sp>
       <p:sp>
         <p:nvSpPr>
-          <p:cNvPr id="11" name="Shape 9"/>
+          <p:cNvPr id="11" name="Text 9"/>
+          <p:cNvSpPr txBox="1"/>
+          <p:nvPr/>
+        </p:nvSpPr>
+        <p:spPr>
+          <a:xfrm>
+            <a:off x="4693615" y="566928"/>
+            <a:ext cx="6949440" cy="640080"/>
+          </a:xfrm>
+          <a:prstGeom prst="rect">
+            <a:avLst/>
+          </a:prstGeom>
+          <a:noFill/>
+          <a:ln/>
+        </p:spPr>
+        <p:txBody>
+          <a:bodyPr wrap="square" lIns="0" tIns="0" rIns="0" bIns="0" rtlCol="0" anchor="t"/>
+          <a:lstStyle/>
+          <a:p>
+            <a:pPr algn="r" indent="0" marL="0">
+              <a:buNone/>
+            </a:pPr>
+            <a:r>
+              <a:rPr lang="en-US" sz="1300" dirty="0">
+                <a:solidFill>
+                  <a:srgbClr val="CFE3EA"/>
+                </a:solidFill>
+                <a:latin typeface="Calibri" pitchFamily="34" charset="0"/>
+                <a:ea typeface="Calibri" pitchFamily="34" charset="-122"/>
+                <a:cs typeface="Calibri" pitchFamily="34" charset="-120"/>
+              </a:rPr>
+              <a:t>Presentazione del codice. I concetti, le figure e le domande sono nella presentazione della lezione:</a:t>
+            </a:r>
+            <a:endParaRPr lang="en-US" sz="1300" dirty="0"/>
+          </a:p>
+          <a:p>
+            <a:pPr algn="r" indent="0" marL="0">
+              <a:buNone/>
+            </a:pPr>
+            <a:r>
+              <a:rPr lang="en-US" sz="1300" dirty="0">
+                <a:solidFill>
+                  <a:srgbClr val="CFE3EA"/>
+                </a:solidFill>
+                <a:latin typeface="Calibri" pitchFamily="34" charset="0"/>
+                <a:ea typeface="Calibri" pitchFamily="34" charset="-122"/>
+                <a:cs typeface="Calibri" pitchFamily="34" charset="-120"/>
+              </a:rPr>
+              <a:t>20-Architettura_dei_Calcolatori-Scheda_Video.pptx</a:t>
+            </a:r>
+            <a:endParaRPr lang="en-US" sz="1300" dirty="0"/>
+          </a:p>
+        </p:txBody>
+      </p:sp>
+      <p:sp>
+        <p:nvSpPr>
+          <p:cNvPr id="12" name="Shape 10"/>
           <p:cNvSpPr/>
           <p:nvPr/>
         </p:nvSpPr>
@@ -2443,7 +2499,7 @@
       </p:sp>
       <p:pic>
         <p:nvPicPr>
-          <p:cNvPr id="12" name="Image 0" descr="/Users/raffaelemontella/devel/riscv-prg32/computer-architecture-with-prg32/tools/assets/game_raycaster.png">    </p:cNvPr>
+          <p:cNvPr id="13" name="Image 0" descr="/Users/raffaelemontella/devel/riscv-prg32/computer-architecture-with-prg32/tools/assets/game_raycaster.png">    </p:cNvPr>
           <p:cNvPicPr>
             <a:picLocks noChangeAspect="1"/>
           </p:cNvPicPr>

--- a/it/slides/20-Architettura_dei_Calcolatori-Scheda_Video-Codice.pptx
+++ b/it/slides/20-Architettura_dei_Calcolatori-Scheda_Video-Codice.pptx
@@ -117,24 +117,24 @@
   <p:extLst>
     <p:ext uri="{521415D9-36F7-43E2-AB2F-B90AF26B5E84}">
       <p14:sectionLst xmlns:p14="http://schemas.microsoft.com/office/powerpoint/2010/main">
-        <p14:section name="Apertura" id="{f1c72a54-93bb-5d71-e70d-84fa594335cd}">
+        <p14:section name="Apertura" id="{780228c0-0af5-dd40-8bbd-75a973047749}">
           <p14:sldIdLst>
             <p14:sldId id="256"/>
             <p14:sldId id="257"/>
           </p14:sldIdLst>
         </p14:section>
-        <p14:section name="Riscaldamento sulla macchina" id="{f63f739c-632e-8bae-c1c9-9088e2aad5d6}">
+        <p14:section name="Riscaldamento sulla macchina" id="{4d4b37f8-60a2-6a08-2bd4-108e56036d70}">
           <p14:sldIdLst>
             <p14:sldId id="258"/>
           </p14:sldIdLst>
         </p14:section>
-        <p14:section name="Il programma completo" id="{1021300e-a4bf-6558-c6d5-82fa0b916e36}">
+        <p14:section name="Il programma completo" id="{e4dd5b86-45cf-9e26-8790-db37e4fcbe7e}">
           <p14:sldIdLst>
             <p14:sldId id="259"/>
             <p14:sldId id="260"/>
           </p14:sldIdLst>
         </p14:section>
-        <p14:section name="Eseguire e provare" id="{ba9529ca-8268-75a5-5873-7e44aedb8906}">
+        <p14:section name="Eseguire e provare" id="{864aa97b-0697-facb-e60a-af02a22f8ad5}">
           <p14:sldIdLst>
             <p14:sldId id="261"/>
             <p14:sldId id="262"/>
@@ -143,7 +143,7 @@
             <p14:sldId id="265"/>
           </p14:sldIdLst>
         </p14:section>
-        <p14:section name="Esercizi" id="{43ebc217-861b-c6c5-69bb-8805e9195cb1}">
+        <p14:section name="Esercizi" id="{aa4daa41-ffdf-ae4b-f98d-dee9bbb39960}">
           <p14:sldIdLst>
             <p14:sldId id="266"/>
           </p14:sldIdLst>
@@ -552,7 +552,9 @@
           <a:p>
             <a:r>
               <a:rPr lang="en-US" dirty="0"/>
-              <a:t>Questa è la presentazione del codice della Lezione 20. La presentazione della lezione contiene i concetti; questa contiene tutto ciò che si scrive e si esegue: i listati con la loro spiegazione, il programma completo, che cosa mostra, e il modo di provarlo su ciascuno dei tre host.</a:t>
+              <a:t>Questa è la presentazione del codice della Lezione 20. La presentazione della lezione contiene i concetti; questa contiene tutto ciò che si scrive e si esegue: i listati con la loro spiegazione, il programma completo, che cosa mostra, e il modo di provarlo su ciascuno dei tre host.
+Stato di apprendimento: DA COMPRENDERE OGGI, alla fine di questa lezione lo spiegate, lo seguite passo passo e lo applicate da soli; DA UTILIZZARE OGGI, oggi seguite e usate la ricetta; come funziona dentro si spiega più avanti, o non fa parte del corso; DA COMPRENDERE PIÙ AVANTI, riconoscete il nome e lo scopo; lo spiega una lezione successiva. Una slide senza etichetta è contesto: una storia, un esempio, una domanda, un esercizio.
+Stato di apprendimento di questa lezione. DA COMPRENDERE OGGI: il frame buffer; i controllori delle periferiche; bus e banda; la scheda video; GPU e GPGPU. DA UTILIZZARE OGGI: il programma completo, gli strumenti di PRG32 (si usa, non si studia, in questo corso). DA COMPRENDERE PIÙ AVANTI: niente. Una slide senza etichetta è contesto: una storia, un esempio, una domanda, un esercizio.</a:t>
             </a:r>
             <a:endParaRPr lang="en-US" dirty="0"/>
           </a:p>
@@ -641,6 +643,7 @@
             <a:r>
               <a:rPr lang="en-US" dirty="0"/>
               <a:t>I cinque sintomi più comuni, che cosa significa ciascuno, e che cosa fare. Leggete il messaggio prima di cambiare qualcosa: quasi sempre nomina la causa.
+DA UTILIZZARE OGGI: gli strumenti di PRG32 (si usa, non si studia, in questo corso).
 Per il docente: Le prime tre righe coprono la maggior parte dei casi. Quando chiedete aiuto, incollate il comando e l'intero messaggio come testo. docs/usage/troubleshooting.md del repository di PRG32 ha l'elenco completo.</a:t>
             </a:r>
             <a:endParaRPr lang="en-US" dirty="0"/>
@@ -908,6 +911,7 @@
             <a:r>
               <a:rPr lang="en-US" dirty="0"/>
               <a:t>Le prime quattro righe sono vostre: x in a0, y in a1, un colore in a2, e una chiamata a prg32_gfx_pixel. La seconda metà mostra, in linea di principio, che cosa ne fa il runtime: moltiplica y per 320, somma x, somma l'indirizzo del frame buffer, e vi memorizza un byte. Lo schermo è un array in memoria con un elemento per pixel, e disegnare un pixel è uno store. Non compare nulla finché il frame non viene inviato al display. Su un PC, conservare il frame e inviarlo sono il compito della scheda video.
+DA COMPRENDERE OGGI: il frame buffer.
 Per il docente: La seconda metà è uno schema di principio, non il sorgente del runtime: t3 sta per l'indice di palette che il runtime ricava dal colore RGB565 in a2. Sull'ESP32-C6 il frame buffer di PRG32 è di 320 x 200 byte, un indice di palette per pixel (docs/hardware/ili9341.md).</a:t>
             </a:r>
             <a:endParaRPr lang="en-US" dirty="0"/>
@@ -997,6 +1001,7 @@
             <a:r>
               <a:rPr lang="en-US" dirty="0"/>
               <a:t>Una pagina del programma completo, esattamente com'è nel repository. Leggetelo dall'inizio: l'intestazione dice che cosa mostra il programma e come compilarlo; seguono le tre funzioni init, update e draw, poi i dati. Le righe incontrate nei listati della lezione hanno qui gli stessi commenti.
+DA UTILIZZARE OGGI: il programma completo (si usa, non si studia, in questo corso).
 Per il docente: code/l20.S, come viene compilato ed eseguito dai test. I commenti fanno parte del programma, e sono in inglese come in tutti i listati: leggeteli con il codice.</a:t>
             </a:r>
             <a:endParaRPr lang="en-US" dirty="0"/>
@@ -1086,6 +1091,7 @@
             <a:r>
               <a:rPr lang="en-US" dirty="0"/>
               <a:t>Una pagina del programma completo, esattamente com'è nel repository. Leggetelo dall'inizio: l'intestazione dice che cosa mostra il programma e come compilarlo; seguono le tre funzioni init, update e draw, poi i dati. Le righe incontrate nei listati della lezione hanno qui gli stessi commenti.
+DA UTILIZZARE OGGI: il programma completo (si usa, non si studia, in questo corso).
 Per il docente: code/l20.S, come viene compilato ed eseguito dai test. I commenti fanno parte del programma, e sono in inglese come in tutti i listati: leggeteli con il codice.</a:t>
             </a:r>
             <a:endParaRPr lang="en-US" dirty="0"/>
@@ -1264,6 +1270,7 @@
             <a:r>
               <a:rPr lang="en-US" dirty="0"/>
               <a:t>La via più rapida: PRG32-QT sul vostro computer. Quattro passi, ciascuno con il suo comando. PRG32-QT si comporta come una scheda sulla porta 8080, ed è per questo che il comando di caricamento dice esp32c6. Con la modalità debug abilitata potete fermarvi su qualsiasi istruzione e leggere registri e memoria.
+DA UTILIZZARE OGGI: gli strumenti di PRG32 (si usa, non si studia, in questo corso).
 Per il docente: Eseguito dai test: la cartuccia di questa slide è compilata con questo comando ed eseguita sull'esecutore senza interfaccia di PRG32-QT. Senza la toolchain: importate il file .prg32 in PRG32-QT e scegliete Run Cartridge. Tasti: frecce o WASD per il joystick, Z o J per A, X o K per B, Invio per Start, Esc per tornare a Setup.</a:t>
             </a:r>
             <a:endParaRPr lang="en-US" dirty="0"/>
@@ -1353,6 +1360,7 @@
             <a:r>
               <a:rPr lang="en-US" dirty="0"/>
               <a:t>Lo stesso programma sull'emulatore. QEMU esegue il firmware vero su un chip emulato, quindi la cartuccia va compilata per l'architettura qemu. Caricate la cartuccia mentre QEMU è chiuso. Il firmware si apre sul menu Setup: scegliete Run Cartridge e lo slot. Ricordate che la tastiera è letta dal terminale, non dalla finestra con l'immagine.
+DA UTILIZZARE OGGI: gli strumenti di PRG32 (si usa, non si studia, in questo corso).
 Per il docente: Verificato dai test fino al caricamento: la cartuccia è compilata per l'architettura qemu e accettata nell'immagine flash dell'emulatore. Ciò che l'emulatore poi mostra non è verificato automaticamente: il QEMU di Espressif ha bisogno della sua finestra. Dall'ottobre 2026 il firmware parte da Setup: scegliete Run Cartridge, poi cart0.</a:t>
             </a:r>
             <a:endParaRPr lang="en-US" dirty="0"/>
@@ -1442,6 +1450,7 @@
             <a:r>
               <a:rPr lang="en-US" dirty="0"/>
               <a:t>Lo stesso programma sul kit. Il firmware si scrive una volta, via USB; dopo, le cartucce viaggiano sul Wi-Fi. Il comando di caricamento è quello usato per PRG32-QT con l'indirizzo della scheda. È l'unico host che i test automatici non eseguono: provatelo, e riferite ciò che vedete.
+DA UTILIZZARE OGGI: gli strumenti di PRG32 (si usa, non si studia, in questo corso).
 Per il docente: Non eseguito dai test: sulla macchina di prova non c'è una scheda. La cartuccia per l'architettura esp32c6 è compilata dai test; i passi sono quelli della documentazione di PRG32. Se la porta seriale non viene trovata, passatela esplicitamente. Per usare il Wi-Fi dell'aula: python3 -m prg32 wifi set --ssid NOME --password PASSWORD --mode sta.</a:t>
             </a:r>
             <a:endParaRPr lang="en-US" dirty="0"/>
@@ -2521,6 +2530,420 @@
           </a:prstGeom>
         </p:spPr>
       </p:pic>
+      <p:sp>
+        <p:nvSpPr>
+          <p:cNvPr id="14" name="Shape 11"/>
+          <p:cNvSpPr/>
+          <p:nvPr/>
+        </p:nvSpPr>
+        <p:spPr>
+          <a:xfrm>
+            <a:off x="8910777" y="91440"/>
+            <a:ext cx="2732278" cy="274320"/>
+          </a:xfrm>
+          <a:prstGeom prst="rect">
+            <a:avLst/>
+          </a:prstGeom>
+          <a:solidFill>
+            <a:srgbClr val="F3E8FF"/>
+          </a:solidFill>
+          <a:ln w="12700">
+            <a:solidFill>
+              <a:srgbClr val="7E22CE"/>
+            </a:solidFill>
+            <a:prstDash val="dash"/>
+          </a:ln>
+        </p:spPr>
+      </p:sp>
+      <p:sp>
+        <p:nvSpPr>
+          <p:cNvPr id="15" name="Shape 12"/>
+          <p:cNvSpPr/>
+          <p:nvPr/>
+        </p:nvSpPr>
+        <p:spPr>
+          <a:xfrm>
+            <a:off x="8938209" y="128016"/>
+            <a:ext cx="45720" cy="45720"/>
+          </a:xfrm>
+          <a:prstGeom prst="rect">
+            <a:avLst/>
+          </a:prstGeom>
+          <a:solidFill>
+            <a:srgbClr val="7E22CE"/>
+          </a:solidFill>
+          <a:ln w="12700">
+            <a:solidFill>
+              <a:srgbClr val="7E22CE"/>
+            </a:solidFill>
+            <a:prstDash val="solid"/>
+          </a:ln>
+        </p:spPr>
+      </p:sp>
+      <p:sp>
+        <p:nvSpPr>
+          <p:cNvPr id="16" name="Shape 13"/>
+          <p:cNvSpPr/>
+          <p:nvPr/>
+        </p:nvSpPr>
+        <p:spPr>
+          <a:xfrm>
+            <a:off x="8938209" y="205740"/>
+            <a:ext cx="45720" cy="45720"/>
+          </a:xfrm>
+          <a:prstGeom prst="rect">
+            <a:avLst/>
+          </a:prstGeom>
+          <a:solidFill>
+            <a:srgbClr val="7E22CE"/>
+          </a:solidFill>
+          <a:ln w="12700">
+            <a:solidFill>
+              <a:srgbClr val="7E22CE"/>
+            </a:solidFill>
+            <a:prstDash val="solid"/>
+          </a:ln>
+        </p:spPr>
+      </p:sp>
+      <p:sp>
+        <p:nvSpPr>
+          <p:cNvPr id="17" name="Shape 14"/>
+          <p:cNvSpPr/>
+          <p:nvPr/>
+        </p:nvSpPr>
+        <p:spPr>
+          <a:xfrm>
+            <a:off x="8938209" y="283464"/>
+            <a:ext cx="45720" cy="45720"/>
+          </a:xfrm>
+          <a:prstGeom prst="rect">
+            <a:avLst/>
+          </a:prstGeom>
+          <a:solidFill>
+            <a:srgbClr val="7E22CE"/>
+          </a:solidFill>
+          <a:ln w="12700">
+            <a:solidFill>
+              <a:srgbClr val="7E22CE"/>
+            </a:solidFill>
+            <a:prstDash val="solid"/>
+          </a:ln>
+        </p:spPr>
+      </p:sp>
+      <p:pic>
+        <p:nvPicPr>
+          <p:cNvPr id="18" name="Image 1" descr="preencoded.png">    </p:cNvPr>
+          <p:cNvPicPr>
+            <a:picLocks noChangeAspect="1"/>
+          </p:cNvPicPr>
+          <p:nvPr/>
+        </p:nvPicPr>
+        <p:blipFill>
+          <a:blip r:embed="rId2"/>
+          <a:stretch>
+            <a:fillRect/>
+          </a:stretch>
+        </p:blipFill>
+        <p:spPr>
+          <a:xfrm>
+            <a:off x="9038793" y="128016"/>
+            <a:ext cx="201168" cy="201168"/>
+          </a:xfrm>
+          <a:prstGeom prst="rect">
+            <a:avLst/>
+          </a:prstGeom>
+        </p:spPr>
+      </p:pic>
+      <p:sp>
+        <p:nvSpPr>
+          <p:cNvPr id="19" name="Text 15"/>
+          <p:cNvSpPr txBox="1"/>
+          <p:nvPr/>
+        </p:nvSpPr>
+        <p:spPr>
+          <a:xfrm>
+            <a:off x="9294825" y="91440"/>
+            <a:ext cx="2311654" cy="274320"/>
+          </a:xfrm>
+          <a:prstGeom prst="rect">
+            <a:avLst/>
+          </a:prstGeom>
+          <a:noFill/>
+          <a:ln/>
+        </p:spPr>
+        <p:txBody>
+          <a:bodyPr wrap="square" lIns="0" tIns="0" rIns="0" bIns="0" rtlCol="0" anchor="ctr"/>
+          <a:lstStyle/>
+          <a:p>
+            <a:pPr indent="0" marL="0">
+              <a:buNone/>
+            </a:pPr>
+            <a:r>
+              <a:rPr lang="en-US" sz="1100" b="1" dirty="0">
+                <a:solidFill>
+                  <a:srgbClr val="6B21A8"/>
+                </a:solidFill>
+                <a:latin typeface="Calibri" pitchFamily="34" charset="0"/>
+                <a:ea typeface="Calibri" pitchFamily="34" charset="-122"/>
+                <a:cs typeface="Calibri" pitchFamily="34" charset="-120"/>
+              </a:rPr>
+              <a:t>DA COMPRENDERE PIÙ AVANTI</a:t>
+            </a:r>
+            <a:endParaRPr lang="en-US" sz="1100" dirty="0"/>
+          </a:p>
+        </p:txBody>
+      </p:sp>
+      <p:sp>
+        <p:nvSpPr>
+          <p:cNvPr id="20" name="Shape 16"/>
+          <p:cNvSpPr/>
+          <p:nvPr/>
+        </p:nvSpPr>
+        <p:spPr>
+          <a:xfrm>
+            <a:off x="6675069" y="91440"/>
+            <a:ext cx="2125980" cy="274320"/>
+          </a:xfrm>
+          <a:prstGeom prst="rect">
+            <a:avLst/>
+          </a:prstGeom>
+          <a:solidFill>
+            <a:srgbClr val="FEF3C7"/>
+          </a:solidFill>
+          <a:ln w="12700">
+            <a:solidFill>
+              <a:srgbClr val="B45309"/>
+            </a:solidFill>
+            <a:prstDash val="solid"/>
+          </a:ln>
+        </p:spPr>
+      </p:sp>
+      <p:sp>
+        <p:nvSpPr>
+          <p:cNvPr id="21" name="Shape 17"/>
+          <p:cNvSpPr/>
+          <p:nvPr/>
+        </p:nvSpPr>
+        <p:spPr>
+          <a:xfrm>
+            <a:off x="6675069" y="91440"/>
+            <a:ext cx="27432" cy="274320"/>
+          </a:xfrm>
+          <a:prstGeom prst="rect">
+            <a:avLst/>
+          </a:prstGeom>
+          <a:solidFill>
+            <a:srgbClr val="B45309"/>
+          </a:solidFill>
+          <a:ln w="12700">
+            <a:solidFill>
+              <a:srgbClr val="B45309"/>
+            </a:solidFill>
+            <a:prstDash val="solid"/>
+          </a:ln>
+        </p:spPr>
+      </p:sp>
+      <p:sp>
+        <p:nvSpPr>
+          <p:cNvPr id="22" name="Shape 18"/>
+          <p:cNvSpPr/>
+          <p:nvPr/>
+        </p:nvSpPr>
+        <p:spPr>
+          <a:xfrm>
+            <a:off x="6729933" y="91440"/>
+            <a:ext cx="27432" cy="274320"/>
+          </a:xfrm>
+          <a:prstGeom prst="rect">
+            <a:avLst/>
+          </a:prstGeom>
+          <a:solidFill>
+            <a:srgbClr val="B45309"/>
+          </a:solidFill>
+          <a:ln w="12700">
+            <a:solidFill>
+              <a:srgbClr val="B45309"/>
+            </a:solidFill>
+            <a:prstDash val="solid"/>
+          </a:ln>
+        </p:spPr>
+      </p:sp>
+      <p:pic>
+        <p:nvPicPr>
+          <p:cNvPr id="23" name="Image 2" descr="preencoded.png">    </p:cNvPr>
+          <p:cNvPicPr>
+            <a:picLocks noChangeAspect="1"/>
+          </p:cNvPicPr>
+          <p:nvPr/>
+        </p:nvPicPr>
+        <p:blipFill>
+          <a:blip r:embed="rId3"/>
+          <a:stretch>
+            <a:fillRect/>
+          </a:stretch>
+        </p:blipFill>
+        <p:spPr>
+          <a:xfrm>
+            <a:off x="6803085" y="128016"/>
+            <a:ext cx="201168" cy="201168"/>
+          </a:xfrm>
+          <a:prstGeom prst="rect">
+            <a:avLst/>
+          </a:prstGeom>
+        </p:spPr>
+      </p:pic>
+      <p:sp>
+        <p:nvSpPr>
+          <p:cNvPr id="24" name="Text 19"/>
+          <p:cNvSpPr txBox="1"/>
+          <p:nvPr/>
+        </p:nvSpPr>
+        <p:spPr>
+          <a:xfrm>
+            <a:off x="7059117" y="91440"/>
+            <a:ext cx="1705356" cy="274320"/>
+          </a:xfrm>
+          <a:prstGeom prst="rect">
+            <a:avLst/>
+          </a:prstGeom>
+          <a:noFill/>
+          <a:ln/>
+        </p:spPr>
+        <p:txBody>
+          <a:bodyPr wrap="square" lIns="0" tIns="0" rIns="0" bIns="0" rtlCol="0" anchor="ctr"/>
+          <a:lstStyle/>
+          <a:p>
+            <a:pPr indent="0" marL="0">
+              <a:buNone/>
+            </a:pPr>
+            <a:r>
+              <a:rPr lang="en-US" sz="1100" b="1" dirty="0">
+                <a:solidFill>
+                  <a:srgbClr val="92400E"/>
+                </a:solidFill>
+                <a:latin typeface="Calibri" pitchFamily="34" charset="0"/>
+                <a:ea typeface="Calibri" pitchFamily="34" charset="-122"/>
+                <a:cs typeface="Calibri" pitchFamily="34" charset="-120"/>
+              </a:rPr>
+              <a:t>DA UTILIZZARE OGGI</a:t>
+            </a:r>
+            <a:endParaRPr lang="en-US" sz="1100" dirty="0"/>
+          </a:p>
+        </p:txBody>
+      </p:sp>
+      <p:sp>
+        <p:nvSpPr>
+          <p:cNvPr id="25" name="Shape 20"/>
+          <p:cNvSpPr/>
+          <p:nvPr/>
+        </p:nvSpPr>
+        <p:spPr>
+          <a:xfrm>
+            <a:off x="4352747" y="91440"/>
+            <a:ext cx="2212594" cy="274320"/>
+          </a:xfrm>
+          <a:prstGeom prst="rect">
+            <a:avLst/>
+          </a:prstGeom>
+          <a:solidFill>
+            <a:srgbClr val="E0F2FE"/>
+          </a:solidFill>
+          <a:ln w="12700">
+            <a:solidFill>
+              <a:srgbClr val="0369A1"/>
+            </a:solidFill>
+            <a:prstDash val="solid"/>
+          </a:ln>
+        </p:spPr>
+      </p:sp>
+      <p:sp>
+        <p:nvSpPr>
+          <p:cNvPr id="26" name="Shape 21"/>
+          <p:cNvSpPr/>
+          <p:nvPr/>
+        </p:nvSpPr>
+        <p:spPr>
+          <a:xfrm>
+            <a:off x="4352747" y="91440"/>
+            <a:ext cx="73152" cy="274320"/>
+          </a:xfrm>
+          <a:prstGeom prst="rect">
+            <a:avLst/>
+          </a:prstGeom>
+          <a:solidFill>
+            <a:srgbClr val="0369A1"/>
+          </a:solidFill>
+          <a:ln w="12700">
+            <a:solidFill>
+              <a:srgbClr val="0369A1"/>
+            </a:solidFill>
+            <a:prstDash val="solid"/>
+          </a:ln>
+        </p:spPr>
+      </p:sp>
+      <p:pic>
+        <p:nvPicPr>
+          <p:cNvPr id="27" name="Image 3" descr="preencoded.png">    </p:cNvPr>
+          <p:cNvPicPr>
+            <a:picLocks noChangeAspect="1"/>
+          </p:cNvPicPr>
+          <p:nvPr/>
+        </p:nvPicPr>
+        <p:blipFill>
+          <a:blip r:embed="rId4"/>
+          <a:stretch>
+            <a:fillRect/>
+          </a:stretch>
+        </p:blipFill>
+        <p:spPr>
+          <a:xfrm>
+            <a:off x="4480763" y="128016"/>
+            <a:ext cx="201168" cy="201168"/>
+          </a:xfrm>
+          <a:prstGeom prst="rect">
+            <a:avLst/>
+          </a:prstGeom>
+        </p:spPr>
+      </p:pic>
+      <p:sp>
+        <p:nvSpPr>
+          <p:cNvPr id="28" name="Text 22"/>
+          <p:cNvSpPr txBox="1"/>
+          <p:nvPr/>
+        </p:nvSpPr>
+        <p:spPr>
+          <a:xfrm>
+            <a:off x="4736795" y="91440"/>
+            <a:ext cx="1791970" cy="274320"/>
+          </a:xfrm>
+          <a:prstGeom prst="rect">
+            <a:avLst/>
+          </a:prstGeom>
+          <a:noFill/>
+          <a:ln/>
+        </p:spPr>
+        <p:txBody>
+          <a:bodyPr wrap="square" lIns="0" tIns="0" rIns="0" bIns="0" rtlCol="0" anchor="ctr"/>
+          <a:lstStyle/>
+          <a:p>
+            <a:pPr indent="0" marL="0">
+              <a:buNone/>
+            </a:pPr>
+            <a:r>
+              <a:rPr lang="en-US" sz="1100" b="1" dirty="0">
+                <a:solidFill>
+                  <a:srgbClr val="075985"/>
+                </a:solidFill>
+                <a:latin typeface="Calibri" pitchFamily="34" charset="0"/>
+                <a:ea typeface="Calibri" pitchFamily="34" charset="-122"/>
+                <a:cs typeface="Calibri" pitchFamily="34" charset="-120"/>
+              </a:rPr>
+              <a:t>DA COMPRENDERE OGGI</a:t>
+            </a:r>
+            <a:endParaRPr lang="en-US" sz="1100" dirty="0"/>
+          </a:p>
+        </p:txBody>
+      </p:sp>
       <p:sp>
         <p:nvSpPr>
           <p:cNvPr id="25" name="Slide Number Placeholder 0"/>
@@ -3904,6 +4327,158 @@
       </p:graphicFrame>
       <p:sp>
         <p:nvSpPr>
+          <p:cNvPr id="4" name="Shape 1"/>
+          <p:cNvSpPr/>
+          <p:nvPr/>
+        </p:nvSpPr>
+        <p:spPr>
+          <a:xfrm>
+            <a:off x="7875600" y="91440"/>
+            <a:ext cx="3767455" cy="274320"/>
+          </a:xfrm>
+          <a:prstGeom prst="rect">
+            <a:avLst/>
+          </a:prstGeom>
+          <a:solidFill>
+            <a:srgbClr val="FEF3C7"/>
+          </a:solidFill>
+          <a:ln w="12700">
+            <a:solidFill>
+              <a:srgbClr val="B45309"/>
+            </a:solidFill>
+            <a:prstDash val="solid"/>
+          </a:ln>
+        </p:spPr>
+      </p:sp>
+      <p:sp>
+        <p:nvSpPr>
+          <p:cNvPr id="5" name="Shape 2"/>
+          <p:cNvSpPr/>
+          <p:nvPr/>
+        </p:nvSpPr>
+        <p:spPr>
+          <a:xfrm>
+            <a:off x="7875600" y="91440"/>
+            <a:ext cx="27432" cy="274320"/>
+          </a:xfrm>
+          <a:prstGeom prst="rect">
+            <a:avLst/>
+          </a:prstGeom>
+          <a:solidFill>
+            <a:srgbClr val="B45309"/>
+          </a:solidFill>
+          <a:ln w="12700">
+            <a:solidFill>
+              <a:srgbClr val="B45309"/>
+            </a:solidFill>
+            <a:prstDash val="solid"/>
+          </a:ln>
+        </p:spPr>
+      </p:sp>
+      <p:sp>
+        <p:nvSpPr>
+          <p:cNvPr id="6" name="Shape 3"/>
+          <p:cNvSpPr/>
+          <p:nvPr/>
+        </p:nvSpPr>
+        <p:spPr>
+          <a:xfrm>
+            <a:off x="7930464" y="91440"/>
+            <a:ext cx="27432" cy="274320"/>
+          </a:xfrm>
+          <a:prstGeom prst="rect">
+            <a:avLst/>
+          </a:prstGeom>
+          <a:solidFill>
+            <a:srgbClr val="B45309"/>
+          </a:solidFill>
+          <a:ln w="12700">
+            <a:solidFill>
+              <a:srgbClr val="B45309"/>
+            </a:solidFill>
+            <a:prstDash val="solid"/>
+          </a:ln>
+        </p:spPr>
+      </p:sp>
+      <p:pic>
+        <p:nvPicPr>
+          <p:cNvPr id="7" name="Image 0" descr="preencoded.png">    </p:cNvPr>
+          <p:cNvPicPr>
+            <a:picLocks noChangeAspect="1"/>
+          </p:cNvPicPr>
+          <p:nvPr/>
+        </p:nvPicPr>
+        <p:blipFill>
+          <a:blip r:embed="rId1"/>
+          <a:stretch>
+            <a:fillRect/>
+          </a:stretch>
+        </p:blipFill>
+        <p:spPr>
+          <a:xfrm>
+            <a:off x="8003616" y="128016"/>
+            <a:ext cx="201168" cy="201168"/>
+          </a:xfrm>
+          <a:prstGeom prst="rect">
+            <a:avLst/>
+          </a:prstGeom>
+        </p:spPr>
+      </p:pic>
+      <p:sp>
+        <p:nvSpPr>
+          <p:cNvPr id="8" name="Text 4"/>
+          <p:cNvSpPr txBox="1"/>
+          <p:nvPr/>
+        </p:nvSpPr>
+        <p:spPr>
+          <a:xfrm>
+            <a:off x="8259648" y="91440"/>
+            <a:ext cx="3346831" cy="274320"/>
+          </a:xfrm>
+          <a:prstGeom prst="rect">
+            <a:avLst/>
+          </a:prstGeom>
+          <a:noFill/>
+          <a:ln/>
+        </p:spPr>
+        <p:txBody>
+          <a:bodyPr wrap="square" lIns="0" tIns="0" rIns="0" bIns="0" rtlCol="0" anchor="ctr"/>
+          <a:lstStyle/>
+          <a:p>
+            <a:pPr indent="0" marL="0">
+              <a:buNone/>
+            </a:pPr>
+            <a:r>
+              <a:rPr lang="en-US" sz="1100" b="1" dirty="0">
+                <a:solidFill>
+                  <a:srgbClr val="92400E"/>
+                </a:solidFill>
+                <a:latin typeface="Calibri" pitchFamily="34" charset="0"/>
+                <a:ea typeface="Calibri" pitchFamily="34" charset="-122"/>
+                <a:cs typeface="Calibri" pitchFamily="34" charset="-120"/>
+              </a:rPr>
+              <a:t>DA UTILIZZARE OGGI</a:t>
+            </a:r>
+            <a:pPr indent="0" marL="0">
+              <a:buNone/>
+            </a:pPr>
+            <a:r>
+              <a:rPr lang="en-US" sz="1100" dirty="0">
+                <a:solidFill>
+                  <a:srgbClr val="92400E"/>
+                </a:solidFill>
+                <a:latin typeface="Calibri" pitchFamily="34" charset="0"/>
+                <a:ea typeface="Calibri" pitchFamily="34" charset="-122"/>
+                <a:cs typeface="Calibri" pitchFamily="34" charset="-120"/>
+              </a:rPr>
+              <a:t> · gli strumenti di PRG32</a:t>
+            </a:r>
+            <a:endParaRPr lang="en-US" sz="1100" dirty="0"/>
+          </a:p>
+        </p:txBody>
+      </p:sp>
+      <p:sp>
+        <p:nvSpPr>
           <p:cNvPr id="25" name="Slide Number Placeholder 0"/>
           <p:cNvSpPr>
             <a:spLocks noGrp="1"/>
@@ -6105,6 +6680,133 @@
       </p:sp>
       <p:sp>
         <p:nvSpPr>
+          <p:cNvPr id="17" name="Shape 15"/>
+          <p:cNvSpPr/>
+          <p:nvPr/>
+        </p:nvSpPr>
+        <p:spPr>
+          <a:xfrm>
+            <a:off x="8248599" y="91440"/>
+            <a:ext cx="3394456" cy="274320"/>
+          </a:xfrm>
+          <a:prstGeom prst="rect">
+            <a:avLst/>
+          </a:prstGeom>
+          <a:solidFill>
+            <a:srgbClr val="E0F2FE"/>
+          </a:solidFill>
+          <a:ln w="12700">
+            <a:solidFill>
+              <a:srgbClr val="0369A1"/>
+            </a:solidFill>
+            <a:prstDash val="solid"/>
+          </a:ln>
+        </p:spPr>
+      </p:sp>
+      <p:sp>
+        <p:nvSpPr>
+          <p:cNvPr id="18" name="Shape 16"/>
+          <p:cNvSpPr/>
+          <p:nvPr/>
+        </p:nvSpPr>
+        <p:spPr>
+          <a:xfrm>
+            <a:off x="8248599" y="91440"/>
+            <a:ext cx="73152" cy="274320"/>
+          </a:xfrm>
+          <a:prstGeom prst="rect">
+            <a:avLst/>
+          </a:prstGeom>
+          <a:solidFill>
+            <a:srgbClr val="0369A1"/>
+          </a:solidFill>
+          <a:ln w="12700">
+            <a:solidFill>
+              <a:srgbClr val="0369A1"/>
+            </a:solidFill>
+            <a:prstDash val="solid"/>
+          </a:ln>
+        </p:spPr>
+      </p:sp>
+      <p:pic>
+        <p:nvPicPr>
+          <p:cNvPr id="19" name="Image 0" descr="preencoded.png">    </p:cNvPr>
+          <p:cNvPicPr>
+            <a:picLocks noChangeAspect="1"/>
+          </p:cNvPicPr>
+          <p:nvPr/>
+        </p:nvPicPr>
+        <p:blipFill>
+          <a:blip r:embed="rId1"/>
+          <a:stretch>
+            <a:fillRect/>
+          </a:stretch>
+        </p:blipFill>
+        <p:spPr>
+          <a:xfrm>
+            <a:off x="8376615" y="128016"/>
+            <a:ext cx="201168" cy="201168"/>
+          </a:xfrm>
+          <a:prstGeom prst="rect">
+            <a:avLst/>
+          </a:prstGeom>
+        </p:spPr>
+      </p:pic>
+      <p:sp>
+        <p:nvSpPr>
+          <p:cNvPr id="20" name="Text 17"/>
+          <p:cNvSpPr txBox="1"/>
+          <p:nvPr/>
+        </p:nvSpPr>
+        <p:spPr>
+          <a:xfrm>
+            <a:off x="8632647" y="91440"/>
+            <a:ext cx="2973832" cy="274320"/>
+          </a:xfrm>
+          <a:prstGeom prst="rect">
+            <a:avLst/>
+          </a:prstGeom>
+          <a:noFill/>
+          <a:ln/>
+        </p:spPr>
+        <p:txBody>
+          <a:bodyPr wrap="square" lIns="0" tIns="0" rIns="0" bIns="0" rtlCol="0" anchor="ctr"/>
+          <a:lstStyle/>
+          <a:p>
+            <a:pPr indent="0" marL="0">
+              <a:buNone/>
+            </a:pPr>
+            <a:r>
+              <a:rPr lang="en-US" sz="1100" b="1" dirty="0">
+                <a:solidFill>
+                  <a:srgbClr val="075985"/>
+                </a:solidFill>
+                <a:latin typeface="Calibri" pitchFamily="34" charset="0"/>
+                <a:ea typeface="Calibri" pitchFamily="34" charset="-122"/>
+                <a:cs typeface="Calibri" pitchFamily="34" charset="-120"/>
+              </a:rPr>
+              <a:t>DA COMPRENDERE OGGI</a:t>
+            </a:r>
+            <a:pPr indent="0" marL="0">
+              <a:buNone/>
+            </a:pPr>
+            <a:r>
+              <a:rPr lang="en-US" sz="1100" dirty="0">
+                <a:solidFill>
+                  <a:srgbClr val="075985"/>
+                </a:solidFill>
+                <a:latin typeface="Calibri" pitchFamily="34" charset="0"/>
+                <a:ea typeface="Calibri" pitchFamily="34" charset="-122"/>
+                <a:cs typeface="Calibri" pitchFamily="34" charset="-120"/>
+              </a:rPr>
+              <a:t> · il frame buffer</a:t>
+            </a:r>
+            <a:endParaRPr lang="en-US" sz="1100" dirty="0"/>
+          </a:p>
+        </p:txBody>
+      </p:sp>
+      <p:sp>
+        <p:nvSpPr>
           <p:cNvPr id="25" name="Slide Number Placeholder 0"/>
           <p:cNvSpPr>
             <a:spLocks noGrp="1"/>
@@ -6591,6 +7293,158 @@
       </p:sp>
       <p:sp>
         <p:nvSpPr>
+          <p:cNvPr id="5" name="Shape 3"/>
+          <p:cNvSpPr/>
+          <p:nvPr/>
+        </p:nvSpPr>
+        <p:spPr>
+          <a:xfrm>
+            <a:off x="7941259" y="91440"/>
+            <a:ext cx="3701796" cy="274320"/>
+          </a:xfrm>
+          <a:prstGeom prst="rect">
+            <a:avLst/>
+          </a:prstGeom>
+          <a:solidFill>
+            <a:srgbClr val="FEF3C7"/>
+          </a:solidFill>
+          <a:ln w="12700">
+            <a:solidFill>
+              <a:srgbClr val="B45309"/>
+            </a:solidFill>
+            <a:prstDash val="solid"/>
+          </a:ln>
+        </p:spPr>
+      </p:sp>
+      <p:sp>
+        <p:nvSpPr>
+          <p:cNvPr id="6" name="Shape 4"/>
+          <p:cNvSpPr/>
+          <p:nvPr/>
+        </p:nvSpPr>
+        <p:spPr>
+          <a:xfrm>
+            <a:off x="7941259" y="91440"/>
+            <a:ext cx="27432" cy="274320"/>
+          </a:xfrm>
+          <a:prstGeom prst="rect">
+            <a:avLst/>
+          </a:prstGeom>
+          <a:solidFill>
+            <a:srgbClr val="B45309"/>
+          </a:solidFill>
+          <a:ln w="12700">
+            <a:solidFill>
+              <a:srgbClr val="B45309"/>
+            </a:solidFill>
+            <a:prstDash val="solid"/>
+          </a:ln>
+        </p:spPr>
+      </p:sp>
+      <p:sp>
+        <p:nvSpPr>
+          <p:cNvPr id="7" name="Shape 5"/>
+          <p:cNvSpPr/>
+          <p:nvPr/>
+        </p:nvSpPr>
+        <p:spPr>
+          <a:xfrm>
+            <a:off x="7996123" y="91440"/>
+            <a:ext cx="27432" cy="274320"/>
+          </a:xfrm>
+          <a:prstGeom prst="rect">
+            <a:avLst/>
+          </a:prstGeom>
+          <a:solidFill>
+            <a:srgbClr val="B45309"/>
+          </a:solidFill>
+          <a:ln w="12700">
+            <a:solidFill>
+              <a:srgbClr val="B45309"/>
+            </a:solidFill>
+            <a:prstDash val="solid"/>
+          </a:ln>
+        </p:spPr>
+      </p:sp>
+      <p:pic>
+        <p:nvPicPr>
+          <p:cNvPr id="8" name="Image 0" descr="preencoded.png">    </p:cNvPr>
+          <p:cNvPicPr>
+            <a:picLocks noChangeAspect="1"/>
+          </p:cNvPicPr>
+          <p:nvPr/>
+        </p:nvPicPr>
+        <p:blipFill>
+          <a:blip r:embed="rId1"/>
+          <a:stretch>
+            <a:fillRect/>
+          </a:stretch>
+        </p:blipFill>
+        <p:spPr>
+          <a:xfrm>
+            <a:off x="8069275" y="128016"/>
+            <a:ext cx="201168" cy="201168"/>
+          </a:xfrm>
+          <a:prstGeom prst="rect">
+            <a:avLst/>
+          </a:prstGeom>
+        </p:spPr>
+      </p:pic>
+      <p:sp>
+        <p:nvSpPr>
+          <p:cNvPr id="9" name="Text 6"/>
+          <p:cNvSpPr txBox="1"/>
+          <p:nvPr/>
+        </p:nvSpPr>
+        <p:spPr>
+          <a:xfrm>
+            <a:off x="8325307" y="91440"/>
+            <a:ext cx="3281172" cy="274320"/>
+          </a:xfrm>
+          <a:prstGeom prst="rect">
+            <a:avLst/>
+          </a:prstGeom>
+          <a:noFill/>
+          <a:ln/>
+        </p:spPr>
+        <p:txBody>
+          <a:bodyPr wrap="square" lIns="0" tIns="0" rIns="0" bIns="0" rtlCol="0" anchor="ctr"/>
+          <a:lstStyle/>
+          <a:p>
+            <a:pPr indent="0" marL="0">
+              <a:buNone/>
+            </a:pPr>
+            <a:r>
+              <a:rPr lang="en-US" sz="1100" b="1" dirty="0">
+                <a:solidFill>
+                  <a:srgbClr val="92400E"/>
+                </a:solidFill>
+                <a:latin typeface="Calibri" pitchFamily="34" charset="0"/>
+                <a:ea typeface="Calibri" pitchFamily="34" charset="-122"/>
+                <a:cs typeface="Calibri" pitchFamily="34" charset="-120"/>
+              </a:rPr>
+              <a:t>DA UTILIZZARE OGGI</a:t>
+            </a:r>
+            <a:pPr indent="0" marL="0">
+              <a:buNone/>
+            </a:pPr>
+            <a:r>
+              <a:rPr lang="en-US" sz="1100" dirty="0">
+                <a:solidFill>
+                  <a:srgbClr val="92400E"/>
+                </a:solidFill>
+                <a:latin typeface="Calibri" pitchFamily="34" charset="0"/>
+                <a:ea typeface="Calibri" pitchFamily="34" charset="-122"/>
+                <a:cs typeface="Calibri" pitchFamily="34" charset="-120"/>
+              </a:rPr>
+              <a:t> · il programma completo</a:t>
+            </a:r>
+            <a:endParaRPr lang="en-US" sz="1100" dirty="0"/>
+          </a:p>
+        </p:txBody>
+      </p:sp>
+      <p:sp>
+        <p:nvSpPr>
           <p:cNvPr id="25" name="Slide Number Placeholder 0"/>
           <p:cNvSpPr>
             <a:spLocks noGrp="1"/>
@@ -7014,6 +7868,158 @@
       </p:sp>
       <p:sp>
         <p:nvSpPr>
+          <p:cNvPr id="5" name="Shape 3"/>
+          <p:cNvSpPr/>
+          <p:nvPr/>
+        </p:nvSpPr>
+        <p:spPr>
+          <a:xfrm>
+            <a:off x="7941259" y="91440"/>
+            <a:ext cx="3701796" cy="274320"/>
+          </a:xfrm>
+          <a:prstGeom prst="rect">
+            <a:avLst/>
+          </a:prstGeom>
+          <a:solidFill>
+            <a:srgbClr val="FEF3C7"/>
+          </a:solidFill>
+          <a:ln w="12700">
+            <a:solidFill>
+              <a:srgbClr val="B45309"/>
+            </a:solidFill>
+            <a:prstDash val="solid"/>
+          </a:ln>
+        </p:spPr>
+      </p:sp>
+      <p:sp>
+        <p:nvSpPr>
+          <p:cNvPr id="6" name="Shape 4"/>
+          <p:cNvSpPr/>
+          <p:nvPr/>
+        </p:nvSpPr>
+        <p:spPr>
+          <a:xfrm>
+            <a:off x="7941259" y="91440"/>
+            <a:ext cx="27432" cy="274320"/>
+          </a:xfrm>
+          <a:prstGeom prst="rect">
+            <a:avLst/>
+          </a:prstGeom>
+          <a:solidFill>
+            <a:srgbClr val="B45309"/>
+          </a:solidFill>
+          <a:ln w="12700">
+            <a:solidFill>
+              <a:srgbClr val="B45309"/>
+            </a:solidFill>
+            <a:prstDash val="solid"/>
+          </a:ln>
+        </p:spPr>
+      </p:sp>
+      <p:sp>
+        <p:nvSpPr>
+          <p:cNvPr id="7" name="Shape 5"/>
+          <p:cNvSpPr/>
+          <p:nvPr/>
+        </p:nvSpPr>
+        <p:spPr>
+          <a:xfrm>
+            <a:off x="7996123" y="91440"/>
+            <a:ext cx="27432" cy="274320"/>
+          </a:xfrm>
+          <a:prstGeom prst="rect">
+            <a:avLst/>
+          </a:prstGeom>
+          <a:solidFill>
+            <a:srgbClr val="B45309"/>
+          </a:solidFill>
+          <a:ln w="12700">
+            <a:solidFill>
+              <a:srgbClr val="B45309"/>
+            </a:solidFill>
+            <a:prstDash val="solid"/>
+          </a:ln>
+        </p:spPr>
+      </p:sp>
+      <p:pic>
+        <p:nvPicPr>
+          <p:cNvPr id="8" name="Image 0" descr="preencoded.png">    </p:cNvPr>
+          <p:cNvPicPr>
+            <a:picLocks noChangeAspect="1"/>
+          </p:cNvPicPr>
+          <p:nvPr/>
+        </p:nvPicPr>
+        <p:blipFill>
+          <a:blip r:embed="rId1"/>
+          <a:stretch>
+            <a:fillRect/>
+          </a:stretch>
+        </p:blipFill>
+        <p:spPr>
+          <a:xfrm>
+            <a:off x="8069275" y="128016"/>
+            <a:ext cx="201168" cy="201168"/>
+          </a:xfrm>
+          <a:prstGeom prst="rect">
+            <a:avLst/>
+          </a:prstGeom>
+        </p:spPr>
+      </p:pic>
+      <p:sp>
+        <p:nvSpPr>
+          <p:cNvPr id="9" name="Text 6"/>
+          <p:cNvSpPr txBox="1"/>
+          <p:nvPr/>
+        </p:nvSpPr>
+        <p:spPr>
+          <a:xfrm>
+            <a:off x="8325307" y="91440"/>
+            <a:ext cx="3281172" cy="274320"/>
+          </a:xfrm>
+          <a:prstGeom prst="rect">
+            <a:avLst/>
+          </a:prstGeom>
+          <a:noFill/>
+          <a:ln/>
+        </p:spPr>
+        <p:txBody>
+          <a:bodyPr wrap="square" lIns="0" tIns="0" rIns="0" bIns="0" rtlCol="0" anchor="ctr"/>
+          <a:lstStyle/>
+          <a:p>
+            <a:pPr indent="0" marL="0">
+              <a:buNone/>
+            </a:pPr>
+            <a:r>
+              <a:rPr lang="en-US" sz="1100" b="1" dirty="0">
+                <a:solidFill>
+                  <a:srgbClr val="92400E"/>
+                </a:solidFill>
+                <a:latin typeface="Calibri" pitchFamily="34" charset="0"/>
+                <a:ea typeface="Calibri" pitchFamily="34" charset="-122"/>
+                <a:cs typeface="Calibri" pitchFamily="34" charset="-120"/>
+              </a:rPr>
+              <a:t>DA UTILIZZARE OGGI</a:t>
+            </a:r>
+            <a:pPr indent="0" marL="0">
+              <a:buNone/>
+            </a:pPr>
+            <a:r>
+              <a:rPr lang="en-US" sz="1100" dirty="0">
+                <a:solidFill>
+                  <a:srgbClr val="92400E"/>
+                </a:solidFill>
+                <a:latin typeface="Calibri" pitchFamily="34" charset="0"/>
+                <a:ea typeface="Calibri" pitchFamily="34" charset="-122"/>
+                <a:cs typeface="Calibri" pitchFamily="34" charset="-120"/>
+              </a:rPr>
+              <a:t> · il programma completo</a:t>
+            </a:r>
+            <a:endParaRPr lang="en-US" sz="1100" dirty="0"/>
+          </a:p>
+        </p:txBody>
+      </p:sp>
+      <p:sp>
+        <p:nvSpPr>
           <p:cNvPr id="25" name="Slide Number Placeholder 0"/>
           <p:cNvSpPr>
             <a:spLocks noGrp="1"/>
@@ -8167,6 +9173,158 @@
       </p:sp>
       <p:sp>
         <p:nvSpPr>
+          <p:cNvPr id="17" name="Shape 15"/>
+          <p:cNvSpPr/>
+          <p:nvPr/>
+        </p:nvSpPr>
+        <p:spPr>
+          <a:xfrm>
+            <a:off x="7875600" y="91440"/>
+            <a:ext cx="3767455" cy="274320"/>
+          </a:xfrm>
+          <a:prstGeom prst="rect">
+            <a:avLst/>
+          </a:prstGeom>
+          <a:solidFill>
+            <a:srgbClr val="FEF3C7"/>
+          </a:solidFill>
+          <a:ln w="12700">
+            <a:solidFill>
+              <a:srgbClr val="B45309"/>
+            </a:solidFill>
+            <a:prstDash val="solid"/>
+          </a:ln>
+        </p:spPr>
+      </p:sp>
+      <p:sp>
+        <p:nvSpPr>
+          <p:cNvPr id="18" name="Shape 16"/>
+          <p:cNvSpPr/>
+          <p:nvPr/>
+        </p:nvSpPr>
+        <p:spPr>
+          <a:xfrm>
+            <a:off x="7875600" y="91440"/>
+            <a:ext cx="27432" cy="274320"/>
+          </a:xfrm>
+          <a:prstGeom prst="rect">
+            <a:avLst/>
+          </a:prstGeom>
+          <a:solidFill>
+            <a:srgbClr val="B45309"/>
+          </a:solidFill>
+          <a:ln w="12700">
+            <a:solidFill>
+              <a:srgbClr val="B45309"/>
+            </a:solidFill>
+            <a:prstDash val="solid"/>
+          </a:ln>
+        </p:spPr>
+      </p:sp>
+      <p:sp>
+        <p:nvSpPr>
+          <p:cNvPr id="19" name="Shape 17"/>
+          <p:cNvSpPr/>
+          <p:nvPr/>
+        </p:nvSpPr>
+        <p:spPr>
+          <a:xfrm>
+            <a:off x="7930464" y="91440"/>
+            <a:ext cx="27432" cy="274320"/>
+          </a:xfrm>
+          <a:prstGeom prst="rect">
+            <a:avLst/>
+          </a:prstGeom>
+          <a:solidFill>
+            <a:srgbClr val="B45309"/>
+          </a:solidFill>
+          <a:ln w="12700">
+            <a:solidFill>
+              <a:srgbClr val="B45309"/>
+            </a:solidFill>
+            <a:prstDash val="solid"/>
+          </a:ln>
+        </p:spPr>
+      </p:sp>
+      <p:pic>
+        <p:nvPicPr>
+          <p:cNvPr id="20" name="Image 0" descr="preencoded.png">    </p:cNvPr>
+          <p:cNvPicPr>
+            <a:picLocks noChangeAspect="1"/>
+          </p:cNvPicPr>
+          <p:nvPr/>
+        </p:nvPicPr>
+        <p:blipFill>
+          <a:blip r:embed="rId1"/>
+          <a:stretch>
+            <a:fillRect/>
+          </a:stretch>
+        </p:blipFill>
+        <p:spPr>
+          <a:xfrm>
+            <a:off x="8003616" y="128016"/>
+            <a:ext cx="201168" cy="201168"/>
+          </a:xfrm>
+          <a:prstGeom prst="rect">
+            <a:avLst/>
+          </a:prstGeom>
+        </p:spPr>
+      </p:pic>
+      <p:sp>
+        <p:nvSpPr>
+          <p:cNvPr id="21" name="Text 18"/>
+          <p:cNvSpPr txBox="1"/>
+          <p:nvPr/>
+        </p:nvSpPr>
+        <p:spPr>
+          <a:xfrm>
+            <a:off x="8259648" y="91440"/>
+            <a:ext cx="3346831" cy="274320"/>
+          </a:xfrm>
+          <a:prstGeom prst="rect">
+            <a:avLst/>
+          </a:prstGeom>
+          <a:noFill/>
+          <a:ln/>
+        </p:spPr>
+        <p:txBody>
+          <a:bodyPr wrap="square" lIns="0" tIns="0" rIns="0" bIns="0" rtlCol="0" anchor="ctr"/>
+          <a:lstStyle/>
+          <a:p>
+            <a:pPr indent="0" marL="0">
+              <a:buNone/>
+            </a:pPr>
+            <a:r>
+              <a:rPr lang="en-US" sz="1100" b="1" dirty="0">
+                <a:solidFill>
+                  <a:srgbClr val="92400E"/>
+                </a:solidFill>
+                <a:latin typeface="Calibri" pitchFamily="34" charset="0"/>
+                <a:ea typeface="Calibri" pitchFamily="34" charset="-122"/>
+                <a:cs typeface="Calibri" pitchFamily="34" charset="-120"/>
+              </a:rPr>
+              <a:t>DA UTILIZZARE OGGI</a:t>
+            </a:r>
+            <a:pPr indent="0" marL="0">
+              <a:buNone/>
+            </a:pPr>
+            <a:r>
+              <a:rPr lang="en-US" sz="1100" dirty="0">
+                <a:solidFill>
+                  <a:srgbClr val="92400E"/>
+                </a:solidFill>
+                <a:latin typeface="Calibri" pitchFamily="34" charset="0"/>
+                <a:ea typeface="Calibri" pitchFamily="34" charset="-122"/>
+                <a:cs typeface="Calibri" pitchFamily="34" charset="-120"/>
+              </a:rPr>
+              <a:t> · gli strumenti di PRG32</a:t>
+            </a:r>
+            <a:endParaRPr lang="en-US" sz="1100" dirty="0"/>
+          </a:p>
+        </p:txBody>
+      </p:sp>
+      <p:sp>
+        <p:nvSpPr>
           <p:cNvPr id="25" name="Slide Number Placeholder 0"/>
           <p:cNvSpPr>
             <a:spLocks noGrp="1"/>
@@ -9003,6 +10161,158 @@
       </p:sp>
       <p:sp>
         <p:nvSpPr>
+          <p:cNvPr id="17" name="Shape 15"/>
+          <p:cNvSpPr/>
+          <p:nvPr/>
+        </p:nvSpPr>
+        <p:spPr>
+          <a:xfrm>
+            <a:off x="7875600" y="91440"/>
+            <a:ext cx="3767455" cy="274320"/>
+          </a:xfrm>
+          <a:prstGeom prst="rect">
+            <a:avLst/>
+          </a:prstGeom>
+          <a:solidFill>
+            <a:srgbClr val="FEF3C7"/>
+          </a:solidFill>
+          <a:ln w="12700">
+            <a:solidFill>
+              <a:srgbClr val="B45309"/>
+            </a:solidFill>
+            <a:prstDash val="solid"/>
+          </a:ln>
+        </p:spPr>
+      </p:sp>
+      <p:sp>
+        <p:nvSpPr>
+          <p:cNvPr id="18" name="Shape 16"/>
+          <p:cNvSpPr/>
+          <p:nvPr/>
+        </p:nvSpPr>
+        <p:spPr>
+          <a:xfrm>
+            <a:off x="7875600" y="91440"/>
+            <a:ext cx="27432" cy="274320"/>
+          </a:xfrm>
+          <a:prstGeom prst="rect">
+            <a:avLst/>
+          </a:prstGeom>
+          <a:solidFill>
+            <a:srgbClr val="B45309"/>
+          </a:solidFill>
+          <a:ln w="12700">
+            <a:solidFill>
+              <a:srgbClr val="B45309"/>
+            </a:solidFill>
+            <a:prstDash val="solid"/>
+          </a:ln>
+        </p:spPr>
+      </p:sp>
+      <p:sp>
+        <p:nvSpPr>
+          <p:cNvPr id="19" name="Shape 17"/>
+          <p:cNvSpPr/>
+          <p:nvPr/>
+        </p:nvSpPr>
+        <p:spPr>
+          <a:xfrm>
+            <a:off x="7930464" y="91440"/>
+            <a:ext cx="27432" cy="274320"/>
+          </a:xfrm>
+          <a:prstGeom prst="rect">
+            <a:avLst/>
+          </a:prstGeom>
+          <a:solidFill>
+            <a:srgbClr val="B45309"/>
+          </a:solidFill>
+          <a:ln w="12700">
+            <a:solidFill>
+              <a:srgbClr val="B45309"/>
+            </a:solidFill>
+            <a:prstDash val="solid"/>
+          </a:ln>
+        </p:spPr>
+      </p:sp>
+      <p:pic>
+        <p:nvPicPr>
+          <p:cNvPr id="20" name="Image 0" descr="preencoded.png">    </p:cNvPr>
+          <p:cNvPicPr>
+            <a:picLocks noChangeAspect="1"/>
+          </p:cNvPicPr>
+          <p:nvPr/>
+        </p:nvPicPr>
+        <p:blipFill>
+          <a:blip r:embed="rId1"/>
+          <a:stretch>
+            <a:fillRect/>
+          </a:stretch>
+        </p:blipFill>
+        <p:spPr>
+          <a:xfrm>
+            <a:off x="8003616" y="128016"/>
+            <a:ext cx="201168" cy="201168"/>
+          </a:xfrm>
+          <a:prstGeom prst="rect">
+            <a:avLst/>
+          </a:prstGeom>
+        </p:spPr>
+      </p:pic>
+      <p:sp>
+        <p:nvSpPr>
+          <p:cNvPr id="21" name="Text 18"/>
+          <p:cNvSpPr txBox="1"/>
+          <p:nvPr/>
+        </p:nvSpPr>
+        <p:spPr>
+          <a:xfrm>
+            <a:off x="8259648" y="91440"/>
+            <a:ext cx="3346831" cy="274320"/>
+          </a:xfrm>
+          <a:prstGeom prst="rect">
+            <a:avLst/>
+          </a:prstGeom>
+          <a:noFill/>
+          <a:ln/>
+        </p:spPr>
+        <p:txBody>
+          <a:bodyPr wrap="square" lIns="0" tIns="0" rIns="0" bIns="0" rtlCol="0" anchor="ctr"/>
+          <a:lstStyle/>
+          <a:p>
+            <a:pPr indent="0" marL="0">
+              <a:buNone/>
+            </a:pPr>
+            <a:r>
+              <a:rPr lang="en-US" sz="1100" b="1" dirty="0">
+                <a:solidFill>
+                  <a:srgbClr val="92400E"/>
+                </a:solidFill>
+                <a:latin typeface="Calibri" pitchFamily="34" charset="0"/>
+                <a:ea typeface="Calibri" pitchFamily="34" charset="-122"/>
+                <a:cs typeface="Calibri" pitchFamily="34" charset="-120"/>
+              </a:rPr>
+              <a:t>DA UTILIZZARE OGGI</a:t>
+            </a:r>
+            <a:pPr indent="0" marL="0">
+              <a:buNone/>
+            </a:pPr>
+            <a:r>
+              <a:rPr lang="en-US" sz="1100" dirty="0">
+                <a:solidFill>
+                  <a:srgbClr val="92400E"/>
+                </a:solidFill>
+                <a:latin typeface="Calibri" pitchFamily="34" charset="0"/>
+                <a:ea typeface="Calibri" pitchFamily="34" charset="-122"/>
+                <a:cs typeface="Calibri" pitchFamily="34" charset="-120"/>
+              </a:rPr>
+              <a:t> · gli strumenti di PRG32</a:t>
+            </a:r>
+            <a:endParaRPr lang="en-US" sz="1100" dirty="0"/>
+          </a:p>
+        </p:txBody>
+      </p:sp>
+      <p:sp>
+        <p:nvSpPr>
           <p:cNvPr id="25" name="Slide Number Placeholder 0"/>
           <p:cNvSpPr>
             <a:spLocks noGrp="1"/>
@@ -9832,6 +11142,158 @@
                 <a:cs typeface="Calibri" pitchFamily="34" charset="-120"/>
               </a:rPr>
               <a:t>Schermo nero: confrontate il cablaggio del display con il firmware</a:t>
+            </a:r>
+            <a:endParaRPr lang="en-US" sz="1100" dirty="0"/>
+          </a:p>
+        </p:txBody>
+      </p:sp>
+      <p:sp>
+        <p:nvSpPr>
+          <p:cNvPr id="17" name="Shape 15"/>
+          <p:cNvSpPr/>
+          <p:nvPr/>
+        </p:nvSpPr>
+        <p:spPr>
+          <a:xfrm>
+            <a:off x="7875600" y="91440"/>
+            <a:ext cx="3767455" cy="274320"/>
+          </a:xfrm>
+          <a:prstGeom prst="rect">
+            <a:avLst/>
+          </a:prstGeom>
+          <a:solidFill>
+            <a:srgbClr val="FEF3C7"/>
+          </a:solidFill>
+          <a:ln w="12700">
+            <a:solidFill>
+              <a:srgbClr val="B45309"/>
+            </a:solidFill>
+            <a:prstDash val="solid"/>
+          </a:ln>
+        </p:spPr>
+      </p:sp>
+      <p:sp>
+        <p:nvSpPr>
+          <p:cNvPr id="18" name="Shape 16"/>
+          <p:cNvSpPr/>
+          <p:nvPr/>
+        </p:nvSpPr>
+        <p:spPr>
+          <a:xfrm>
+            <a:off x="7875600" y="91440"/>
+            <a:ext cx="27432" cy="274320"/>
+          </a:xfrm>
+          <a:prstGeom prst="rect">
+            <a:avLst/>
+          </a:prstGeom>
+          <a:solidFill>
+            <a:srgbClr val="B45309"/>
+          </a:solidFill>
+          <a:ln w="12700">
+            <a:solidFill>
+              <a:srgbClr val="B45309"/>
+            </a:solidFill>
+            <a:prstDash val="solid"/>
+          </a:ln>
+        </p:spPr>
+      </p:sp>
+      <p:sp>
+        <p:nvSpPr>
+          <p:cNvPr id="19" name="Shape 17"/>
+          <p:cNvSpPr/>
+          <p:nvPr/>
+        </p:nvSpPr>
+        <p:spPr>
+          <a:xfrm>
+            <a:off x="7930464" y="91440"/>
+            <a:ext cx="27432" cy="274320"/>
+          </a:xfrm>
+          <a:prstGeom prst="rect">
+            <a:avLst/>
+          </a:prstGeom>
+          <a:solidFill>
+            <a:srgbClr val="B45309"/>
+          </a:solidFill>
+          <a:ln w="12700">
+            <a:solidFill>
+              <a:srgbClr val="B45309"/>
+            </a:solidFill>
+            <a:prstDash val="solid"/>
+          </a:ln>
+        </p:spPr>
+      </p:sp>
+      <p:pic>
+        <p:nvPicPr>
+          <p:cNvPr id="20" name="Image 0" descr="preencoded.png">    </p:cNvPr>
+          <p:cNvPicPr>
+            <a:picLocks noChangeAspect="1"/>
+          </p:cNvPicPr>
+          <p:nvPr/>
+        </p:nvPicPr>
+        <p:blipFill>
+          <a:blip r:embed="rId1"/>
+          <a:stretch>
+            <a:fillRect/>
+          </a:stretch>
+        </p:blipFill>
+        <p:spPr>
+          <a:xfrm>
+            <a:off x="8003616" y="128016"/>
+            <a:ext cx="201168" cy="201168"/>
+          </a:xfrm>
+          <a:prstGeom prst="rect">
+            <a:avLst/>
+          </a:prstGeom>
+        </p:spPr>
+      </p:pic>
+      <p:sp>
+        <p:nvSpPr>
+          <p:cNvPr id="21" name="Text 18"/>
+          <p:cNvSpPr txBox="1"/>
+          <p:nvPr/>
+        </p:nvSpPr>
+        <p:spPr>
+          <a:xfrm>
+            <a:off x="8259648" y="91440"/>
+            <a:ext cx="3346831" cy="274320"/>
+          </a:xfrm>
+          <a:prstGeom prst="rect">
+            <a:avLst/>
+          </a:prstGeom>
+          <a:noFill/>
+          <a:ln/>
+        </p:spPr>
+        <p:txBody>
+          <a:bodyPr wrap="square" lIns="0" tIns="0" rIns="0" bIns="0" rtlCol="0" anchor="ctr"/>
+          <a:lstStyle/>
+          <a:p>
+            <a:pPr indent="0" marL="0">
+              <a:buNone/>
+            </a:pPr>
+            <a:r>
+              <a:rPr lang="en-US" sz="1100" b="1" dirty="0">
+                <a:solidFill>
+                  <a:srgbClr val="92400E"/>
+                </a:solidFill>
+                <a:latin typeface="Calibri" pitchFamily="34" charset="0"/>
+                <a:ea typeface="Calibri" pitchFamily="34" charset="-122"/>
+                <a:cs typeface="Calibri" pitchFamily="34" charset="-120"/>
+              </a:rPr>
+              <a:t>DA UTILIZZARE OGGI</a:t>
+            </a:r>
+            <a:pPr indent="0" marL="0">
+              <a:buNone/>
+            </a:pPr>
+            <a:r>
+              <a:rPr lang="en-US" sz="1100" dirty="0">
+                <a:solidFill>
+                  <a:srgbClr val="92400E"/>
+                </a:solidFill>
+                <a:latin typeface="Calibri" pitchFamily="34" charset="0"/>
+                <a:ea typeface="Calibri" pitchFamily="34" charset="-122"/>
+                <a:cs typeface="Calibri" pitchFamily="34" charset="-120"/>
+              </a:rPr>
+              <a:t> · gli strumenti di PRG32</a:t>
             </a:r>
             <a:endParaRPr lang="en-US" sz="1100" dirty="0"/>
           </a:p>

--- a/it/slides/20-Architettura_dei_Calcolatori-Scheda_Video-Codice.pptx
+++ b/it/slides/20-Architettura_dei_Calcolatori-Scheda_Video-Codice.pptx
@@ -117,24 +117,24 @@
   <p:extLst>
     <p:ext uri="{521415D9-36F7-43E2-AB2F-B90AF26B5E84}">
       <p14:sectionLst xmlns:p14="http://schemas.microsoft.com/office/powerpoint/2010/main">
-        <p14:section name="Apertura" id="{780228c0-0af5-dd40-8bbd-75a973047749}">
+        <p14:section name="Apertura" id="{2d61515c-6090-a3aa-412f-7acfd0e4f3b8}">
           <p14:sldIdLst>
             <p14:sldId id="256"/>
             <p14:sldId id="257"/>
           </p14:sldIdLst>
         </p14:section>
-        <p14:section name="Riscaldamento sulla macchina" id="{4d4b37f8-60a2-6a08-2bd4-108e56036d70}">
+        <p14:section name="Riscaldamento sulla macchina" id="{7012b19b-cbfb-6fff-0027-5de6390c2c53}">
           <p14:sldIdLst>
             <p14:sldId id="258"/>
           </p14:sldIdLst>
         </p14:section>
-        <p14:section name="Il programma completo" id="{e4dd5b86-45cf-9e26-8790-db37e4fcbe7e}">
+        <p14:section name="Il programma completo" id="{3418233c-e5d5-8c54-3f88-eb70e6b45ca9}">
           <p14:sldIdLst>
             <p14:sldId id="259"/>
             <p14:sldId id="260"/>
           </p14:sldIdLst>
         </p14:section>
-        <p14:section name="Eseguire e provare" id="{864aa97b-0697-facb-e60a-af02a22f8ad5}">
+        <p14:section name="Eseguire e provare" id="{ef251db1-77be-b2f8-1615-141c5a7ae729}">
           <p14:sldIdLst>
             <p14:sldId id="261"/>
             <p14:sldId id="262"/>
@@ -143,7 +143,7 @@
             <p14:sldId id="265"/>
           </p14:sldIdLst>
         </p14:section>
-        <p14:section name="Esercizi" id="{aa4daa41-ffdf-ae4b-f98d-dee9bbb39960}">
+        <p14:section name="Esercizi" id="{b4caa86c-d652-637a-28ba-07ed0abe9ae6}">
           <p14:sldIdLst>
             <p14:sldId id="266"/>
           </p14:sldIdLst>
